--- a/decks/hist-williams-control/hist-williams-control_ch5_land-and-domesday.pptx
+++ b/decks/hist-williams-control/hist-williams-control_ch5_land-and-domesday.pptx
@@ -127,30 +127,30 @@
   <p:extLst>
     <p:ext uri="{521415D9-36F7-43E2-AB2F-B90AF26B5E84}">
       <p14:sectionLst xmlns:p14="http://schemas.microsoft.com/office/powerpoint/2010/main">
-        <p14:section name="Opening" id="{4f1992dd-d597-5948-02e2-af02b58c5529}">
+        <p14:section name="Opening" id="{8022ffe3-77b3-00a9-2c9a-adb011817271}">
           <p14:sldIdLst>
             <p14:sldId id="256"/>
           </p14:sldIdLst>
         </p14:section>
-        <p14:section name="Gate" id="{763cfc2f-a9cb-ff1e-ef07-e5f5a2dfd6b4}">
+        <p14:section name="Gate" id="{a9787652-1fee-a17d-4bb2-7ed458aa1b5c}">
           <p14:sldIdLst>
             <p14:sldId id="257"/>
             <p14:sldId id="258"/>
           </p14:sldIdLst>
         </p14:section>
-        <p14:section name="Pre-teach" id="{7d1a6b36-c59e-b926-e658-b0a8d5fcea8e}">
+        <p14:section name="Pre-teach" id="{a4b24871-6706-15a1-1475-b69b3cfdcec8}">
           <p14:sldIdLst>
             <p14:sldId id="259"/>
             <p14:sldId id="260"/>
           </p14:sldIdLst>
         </p14:section>
-        <p14:section name="Read-along" id="{1bc4ce54-f2b7-1a69-2576-ff5a00d7d630}">
+        <p14:section name="Read-along" id="{ce948ad7-91f6-1b57-eab7-beca20703a63}">
           <p14:sldIdLst>
             <p14:sldId id="261"/>
             <p14:sldId id="262"/>
           </p14:sldIdLst>
         </p14:section>
-        <p14:section name="Teach" id="{fdafac35-d3af-e4ad-edd1-0306767129b7}">
+        <p14:section name="Teach" id="{2a363f07-fc68-f28a-7703-05fe0a3fcbe0}">
           <p14:sldIdLst>
             <p14:sldId id="263"/>
             <p14:sldId id="264"/>
@@ -159,7 +159,7 @@
             <p14:sldId id="267"/>
           </p14:sldIdLst>
         </p14:section>
-        <p14:section name="Routes" id="{f927f0a5-dcd0-b09c-3e2e-bdf4db166147}">
+        <p14:section name="Routes" id="{856ba0c5-b802-e133-b2a5-cf8ae5174c62}">
           <p14:sldIdLst>
             <p14:sldId id="268"/>
             <p14:sldId id="269"/>
@@ -167,12 +167,12 @@
             <p14:sldId id="271"/>
           </p14:sldIdLst>
         </p14:section>
-        <p14:section name="Close" id="{89bcc20c-aa88-99e7-34cf-e912ced113cd}">
+        <p14:section name="Close" id="{0732606e-ebad-8743-3c17-38c51570be03}">
           <p14:sldIdLst>
             <p14:sldId id="272"/>
           </p14:sldIdLst>
         </p14:section>
-        <p14:section name="Answers" id="{83fc6f1e-f22c-e75d-83d6-39e28e9d9bd2}">
+        <p14:section name="Answers" id="{7e3b35b7-ae31-3b29-0ade-6be48e4ef7c2}">
           <p14:sldIdLst>
             <p14:sldId id="273"/>
             <p14:sldId id="274"/>
@@ -2355,7 +2355,7 @@
             <a:r>
               <a:rPr lang="en-US" dirty="0"/>
               <a:t>Teach — Why change who owned the land?. Say it in your own words, then check understanding with a quick question: ask a pupil from the pre-teach group first, since they met these words and ideas before the lesson. Pupils try to recall before you re-explain.
-William had three reasons. First, he did not trust the Saxon earls who ruled the land; they would have to be removed. Second, he needed to reward the men who had helped him win at Hastings and had been loyal since. They had risked their lives, and he would not have been king without them. Third, he knew he could not be everywhere at once and needed a system he could trust to rule all England for him.
+William had three reasons. First, he did not trust the Saxon earls who ruled the land; they would have to be removed. Second, he needed to reward the men who had helped him win at Hastings and had been loyal since. They had risked their lives, and he would not have been king without them. Third, one man cannot be in every corner of a kingdom at the same time, so he needed a system of rule he could rely on while he was elsewhere.
 So William decided to change, drastically, the way land was shared out across England. The result was the Feudal System. The name comes from the Latin word feudum, which your lesson explains as giving land in return for services. Land was the reward, and loyalty and service were the price.
 Think back to your starter: how does a headteacher keep control of a school? Not alone. Heads of year, teachers and form tutors each take charge of a part, and each answers to the person above. William's system worked the same way, with land instead of a salary.
 Tip: Three reasons: trust, reward, and he could not be everywhere. Your lesson's sentence starter is William introduced the Feudal System because…</a:t>
